--- a/Dynamic-Player-Transfer-Value-Prediction-using-AI-and-Multi-source-Data/infosys presentation.pptx
+++ b/Dynamic-Player-Transfer-Value-Prediction-using-AI-and-Multi-source-Data/infosys presentation.pptx
@@ -205,7 +205,7 @@
           <a:p>
             <a:fld id="{C28BDFD6-DD3C-4712-9FDA-7B9CEC0D6A7E}" type="datetimeFigureOut">
               <a:rPr lang="en-IN" smtClean="0"/>
-              <a:t>05-12-2025</a:t>
+              <a:t>01-04-2026</a:t>
             </a:fld>
             <a:endParaRPr lang="en-IN"/>
           </a:p>
@@ -790,7 +790,7 @@
           <a:p>
             <a:fld id="{B504E5D2-0726-4906-9913-A1A21044F92D}" type="datetimeFigureOut">
               <a:rPr lang="en-IN" smtClean="0"/>
-              <a:t>05-12-2025</a:t>
+              <a:t>01-04-2026</a:t>
             </a:fld>
             <a:endParaRPr lang="en-IN"/>
           </a:p>
@@ -990,7 +990,7 @@
           <a:p>
             <a:fld id="{B504E5D2-0726-4906-9913-A1A21044F92D}" type="datetimeFigureOut">
               <a:rPr lang="en-IN" smtClean="0"/>
-              <a:t>05-12-2025</a:t>
+              <a:t>01-04-2026</a:t>
             </a:fld>
             <a:endParaRPr lang="en-IN"/>
           </a:p>
@@ -1200,7 +1200,7 @@
           <a:p>
             <a:fld id="{B504E5D2-0726-4906-9913-A1A21044F92D}" type="datetimeFigureOut">
               <a:rPr lang="en-IN" smtClean="0"/>
-              <a:t>05-12-2025</a:t>
+              <a:t>01-04-2026</a:t>
             </a:fld>
             <a:endParaRPr lang="en-IN"/>
           </a:p>
@@ -1400,7 +1400,7 @@
           <a:p>
             <a:fld id="{B504E5D2-0726-4906-9913-A1A21044F92D}" type="datetimeFigureOut">
               <a:rPr lang="en-IN" smtClean="0"/>
-              <a:t>05-12-2025</a:t>
+              <a:t>01-04-2026</a:t>
             </a:fld>
             <a:endParaRPr lang="en-IN"/>
           </a:p>
@@ -1676,7 +1676,7 @@
           <a:p>
             <a:fld id="{B504E5D2-0726-4906-9913-A1A21044F92D}" type="datetimeFigureOut">
               <a:rPr lang="en-IN" smtClean="0"/>
-              <a:t>05-12-2025</a:t>
+              <a:t>01-04-2026</a:t>
             </a:fld>
             <a:endParaRPr lang="en-IN"/>
           </a:p>
@@ -1944,7 +1944,7 @@
           <a:p>
             <a:fld id="{B504E5D2-0726-4906-9913-A1A21044F92D}" type="datetimeFigureOut">
               <a:rPr lang="en-IN" smtClean="0"/>
-              <a:t>05-12-2025</a:t>
+              <a:t>01-04-2026</a:t>
             </a:fld>
             <a:endParaRPr lang="en-IN"/>
           </a:p>
@@ -2359,7 +2359,7 @@
           <a:p>
             <a:fld id="{B504E5D2-0726-4906-9913-A1A21044F92D}" type="datetimeFigureOut">
               <a:rPr lang="en-IN" smtClean="0"/>
-              <a:t>05-12-2025</a:t>
+              <a:t>01-04-2026</a:t>
             </a:fld>
             <a:endParaRPr lang="en-IN"/>
           </a:p>
@@ -2501,7 +2501,7 @@
           <a:p>
             <a:fld id="{B504E5D2-0726-4906-9913-A1A21044F92D}" type="datetimeFigureOut">
               <a:rPr lang="en-IN" smtClean="0"/>
-              <a:t>05-12-2025</a:t>
+              <a:t>01-04-2026</a:t>
             </a:fld>
             <a:endParaRPr lang="en-IN"/>
           </a:p>
@@ -2614,7 +2614,7 @@
           <a:p>
             <a:fld id="{B504E5D2-0726-4906-9913-A1A21044F92D}" type="datetimeFigureOut">
               <a:rPr lang="en-IN" smtClean="0"/>
-              <a:t>05-12-2025</a:t>
+              <a:t>01-04-2026</a:t>
             </a:fld>
             <a:endParaRPr lang="en-IN"/>
           </a:p>
@@ -2927,7 +2927,7 @@
           <a:p>
             <a:fld id="{B504E5D2-0726-4906-9913-A1A21044F92D}" type="datetimeFigureOut">
               <a:rPr lang="en-IN" smtClean="0"/>
-              <a:t>05-12-2025</a:t>
+              <a:t>01-04-2026</a:t>
             </a:fld>
             <a:endParaRPr lang="en-IN"/>
           </a:p>
@@ -3220,7 +3220,7 @@
           <a:p>
             <a:fld id="{B504E5D2-0726-4906-9913-A1A21044F92D}" type="datetimeFigureOut">
               <a:rPr lang="en-IN" smtClean="0"/>
-              <a:t>05-12-2025</a:t>
+              <a:t>01-04-2026</a:t>
             </a:fld>
             <a:endParaRPr lang="en-IN"/>
           </a:p>
@@ -3463,7 +3463,7 @@
           <a:p>
             <a:fld id="{B504E5D2-0726-4906-9913-A1A21044F92D}" type="datetimeFigureOut">
               <a:rPr lang="en-IN" smtClean="0"/>
-              <a:t>05-12-2025</a:t>
+              <a:t>01-04-2026</a:t>
             </a:fld>
             <a:endParaRPr lang="en-IN"/>
           </a:p>
@@ -4073,7 +4073,7 @@
         <p:spPr>
           <a:xfrm>
             <a:off x="436558" y="4783869"/>
-            <a:ext cx="2912977" cy="523220"/>
+            <a:ext cx="3233578" cy="523220"/>
           </a:xfrm>
           <a:prstGeom prst="rect">
             <a:avLst/>
@@ -4087,12 +4087,12 @@
           <a:lstStyle/>
           <a:p>
             <a:r>
-              <a:rPr lang="en-US" sz="2800" dirty="0">
+              <a:rPr lang="en-US" sz="2800">
                 <a:solidFill>
                   <a:srgbClr val="FFFF00"/>
                 </a:solidFill>
               </a:rPr>
-              <a:t>NAME:V NIVETHA</a:t>
+              <a:t>NAME:CH NEELIMA</a:t>
             </a:r>
             <a:endParaRPr lang="en-IN" sz="2800" dirty="0">
               <a:solidFill>
